--- a/testcases/text-fakebold-gradfill.pptx
+++ b/testcases/text-fakebold-gradfill.pptx
@@ -7,6 +7,7 @@
   <p:sldIdLst>
     <p:sldId id="256" r:id="rId2"/>
     <p:sldId id="257" r:id="rId3"/>
+    <p:sldId id="258" r:id="rId4"/>
   </p:sldIdLst>
   <p:sldSz cx="12192000" cy="6858000"/>
   <p:notesSz cx="6858000" cy="9144000"/>
@@ -130,7 +131,7 @@
           <p:cNvPr id="2" name="标题 1">
             <a:extLst>
               <a:ext uri="{FF2B5EF4-FFF2-40B4-BE49-F238E27FC236}">
-                <a16:creationId xmlns:a16="http://schemas.microsoft.com/office/drawing/2014/main" id="{51A52B9E-D157-3151-0453-DA59CA666E24}"/>
+                <a16:creationId xmlns:a16="http://schemas.microsoft.com/office/drawing/2014/main" id="{F8070A1A-A45F-6982-2CA9-486D6D995637}"/>
               </a:ext>
             </a:extLst>
           </p:cNvPr>
@@ -167,7 +168,7 @@
           <p:cNvPr id="3" name="副标题 2">
             <a:extLst>
               <a:ext uri="{FF2B5EF4-FFF2-40B4-BE49-F238E27FC236}">
-                <a16:creationId xmlns:a16="http://schemas.microsoft.com/office/drawing/2014/main" id="{85F0ADFC-FA12-464D-DF7F-C7B56AB0018B}"/>
+                <a16:creationId xmlns:a16="http://schemas.microsoft.com/office/drawing/2014/main" id="{4402866E-2D5C-E357-54D1-71B81A5B9C0B}"/>
               </a:ext>
             </a:extLst>
           </p:cNvPr>
@@ -237,7 +238,7 @@
           <p:cNvPr id="4" name="日期占位符 3">
             <a:extLst>
               <a:ext uri="{FF2B5EF4-FFF2-40B4-BE49-F238E27FC236}">
-                <a16:creationId xmlns:a16="http://schemas.microsoft.com/office/drawing/2014/main" id="{0825A29A-6BFD-3DA0-2BDA-81B5EBC47C8F}"/>
+                <a16:creationId xmlns:a16="http://schemas.microsoft.com/office/drawing/2014/main" id="{EE4423E0-8C32-48CA-4B1C-EE9C6D20154E}"/>
               </a:ext>
             </a:extLst>
           </p:cNvPr>
@@ -253,9 +254,9 @@
           <a:bodyPr/>
           <a:lstStyle/>
           <a:p>
-            <a:fld id="{7487D30D-F19A-4894-AB07-6FF315866570}" type="datetimeFigureOut">
+            <a:fld id="{89472238-C0D0-468E-B311-CAE8001729F9}" type="datetimeFigureOut">
               <a:rPr lang="zh-CN" altLang="en-US" smtClean="0"/>
-              <a:t>2026/10/23</a:t>
+              <a:t>2026/10/26</a:t>
             </a:fld>
             <a:endParaRPr lang="zh-CN" altLang="en-US"/>
           </a:p>
@@ -266,7 +267,7 @@
           <p:cNvPr id="5" name="页脚占位符 4">
             <a:extLst>
               <a:ext uri="{FF2B5EF4-FFF2-40B4-BE49-F238E27FC236}">
-                <a16:creationId xmlns:a16="http://schemas.microsoft.com/office/drawing/2014/main" id="{05BEC2E3-01C9-0B5A-251D-B6CD8AFA539F}"/>
+                <a16:creationId xmlns:a16="http://schemas.microsoft.com/office/drawing/2014/main" id="{4151617B-71F5-752E-6730-3AE395552F44}"/>
               </a:ext>
             </a:extLst>
           </p:cNvPr>
@@ -291,7 +292,7 @@
           <p:cNvPr id="6" name="灯片编号占位符 5">
             <a:extLst>
               <a:ext uri="{FF2B5EF4-FFF2-40B4-BE49-F238E27FC236}">
-                <a16:creationId xmlns:a16="http://schemas.microsoft.com/office/drawing/2014/main" id="{9B7DFCE2-DF86-8997-BA6D-95B06B1638B3}"/>
+                <a16:creationId xmlns:a16="http://schemas.microsoft.com/office/drawing/2014/main" id="{BB6B77B1-0DAF-34EF-434F-1BB27FBE2A61}"/>
               </a:ext>
             </a:extLst>
           </p:cNvPr>
@@ -307,7 +308,7 @@
           <a:bodyPr/>
           <a:lstStyle/>
           <a:p>
-            <a:fld id="{A6AED4CA-9A86-4B7F-8E0E-2971A6EFE002}" type="slidenum">
+            <a:fld id="{22879A0B-3D3A-4059-8B1F-A9091D248FD3}" type="slidenum">
               <a:rPr lang="zh-CN" altLang="en-US" smtClean="0"/>
               <a:t>‹#›</a:t>
             </a:fld>
@@ -318,7 +319,7 @@
     </p:spTree>
     <p:extLst>
       <p:ext uri="{BB962C8B-B14F-4D97-AF65-F5344CB8AC3E}">
-        <p14:creationId xmlns:p14="http://schemas.microsoft.com/office/powerpoint/2010/main" val="3946721744"/>
+        <p14:creationId xmlns:p14="http://schemas.microsoft.com/office/powerpoint/2010/main" val="1071450490"/>
       </p:ext>
     </p:extLst>
   </p:cSld>
@@ -350,7 +351,7 @@
           <p:cNvPr id="2" name="标题 1">
             <a:extLst>
               <a:ext uri="{FF2B5EF4-FFF2-40B4-BE49-F238E27FC236}">
-                <a16:creationId xmlns:a16="http://schemas.microsoft.com/office/drawing/2014/main" id="{D2ADC210-17EA-374E-8CAF-A6B82C517485}"/>
+                <a16:creationId xmlns:a16="http://schemas.microsoft.com/office/drawing/2014/main" id="{21A33D7D-0F07-7E71-33D3-FB8A05122C03}"/>
               </a:ext>
             </a:extLst>
           </p:cNvPr>
@@ -378,7 +379,7 @@
           <p:cNvPr id="3" name="竖排文字占位符 2">
             <a:extLst>
               <a:ext uri="{FF2B5EF4-FFF2-40B4-BE49-F238E27FC236}">
-                <a16:creationId xmlns:a16="http://schemas.microsoft.com/office/drawing/2014/main" id="{BEC41FBC-1E3E-3AD0-2C71-8804E5F06221}"/>
+                <a16:creationId xmlns:a16="http://schemas.microsoft.com/office/drawing/2014/main" id="{9BB0C487-52A8-2BAA-F007-88A0300FC128}"/>
               </a:ext>
             </a:extLst>
           </p:cNvPr>
@@ -435,7 +436,7 @@
           <p:cNvPr id="4" name="日期占位符 3">
             <a:extLst>
               <a:ext uri="{FF2B5EF4-FFF2-40B4-BE49-F238E27FC236}">
-                <a16:creationId xmlns:a16="http://schemas.microsoft.com/office/drawing/2014/main" id="{C22AB795-CBE6-AC99-F423-2E9A0493E37A}"/>
+                <a16:creationId xmlns:a16="http://schemas.microsoft.com/office/drawing/2014/main" id="{F3ECBB4A-ADE4-E6CA-561B-22197751AB7F}"/>
               </a:ext>
             </a:extLst>
           </p:cNvPr>
@@ -451,9 +452,9 @@
           <a:bodyPr/>
           <a:lstStyle/>
           <a:p>
-            <a:fld id="{7487D30D-F19A-4894-AB07-6FF315866570}" type="datetimeFigureOut">
+            <a:fld id="{89472238-C0D0-468E-B311-CAE8001729F9}" type="datetimeFigureOut">
               <a:rPr lang="zh-CN" altLang="en-US" smtClean="0"/>
-              <a:t>2026/10/23</a:t>
+              <a:t>2026/10/26</a:t>
             </a:fld>
             <a:endParaRPr lang="zh-CN" altLang="en-US"/>
           </a:p>
@@ -464,7 +465,7 @@
           <p:cNvPr id="5" name="页脚占位符 4">
             <a:extLst>
               <a:ext uri="{FF2B5EF4-FFF2-40B4-BE49-F238E27FC236}">
-                <a16:creationId xmlns:a16="http://schemas.microsoft.com/office/drawing/2014/main" id="{5DB672E3-A33E-D805-F5D2-0BDC2F9C15EE}"/>
+                <a16:creationId xmlns:a16="http://schemas.microsoft.com/office/drawing/2014/main" id="{5B4FF07F-4EEB-49FE-8561-797FED877C20}"/>
               </a:ext>
             </a:extLst>
           </p:cNvPr>
@@ -489,7 +490,7 @@
           <p:cNvPr id="6" name="灯片编号占位符 5">
             <a:extLst>
               <a:ext uri="{FF2B5EF4-FFF2-40B4-BE49-F238E27FC236}">
-                <a16:creationId xmlns:a16="http://schemas.microsoft.com/office/drawing/2014/main" id="{2A8ECB6E-1DA5-4B03-B22A-8DACAA98A4F2}"/>
+                <a16:creationId xmlns:a16="http://schemas.microsoft.com/office/drawing/2014/main" id="{EF4F1FDF-242E-2699-DE00-75FBAA35E095}"/>
               </a:ext>
             </a:extLst>
           </p:cNvPr>
@@ -505,7 +506,7 @@
           <a:bodyPr/>
           <a:lstStyle/>
           <a:p>
-            <a:fld id="{A6AED4CA-9A86-4B7F-8E0E-2971A6EFE002}" type="slidenum">
+            <a:fld id="{22879A0B-3D3A-4059-8B1F-A9091D248FD3}" type="slidenum">
               <a:rPr lang="zh-CN" altLang="en-US" smtClean="0"/>
               <a:t>‹#›</a:t>
             </a:fld>
@@ -516,7 +517,7 @@
     </p:spTree>
     <p:extLst>
       <p:ext uri="{BB962C8B-B14F-4D97-AF65-F5344CB8AC3E}">
-        <p14:creationId xmlns:p14="http://schemas.microsoft.com/office/powerpoint/2010/main" val="2549132836"/>
+        <p14:creationId xmlns:p14="http://schemas.microsoft.com/office/powerpoint/2010/main" val="378973671"/>
       </p:ext>
     </p:extLst>
   </p:cSld>
@@ -548,7 +549,7 @@
           <p:cNvPr id="2" name="竖排标题 1">
             <a:extLst>
               <a:ext uri="{FF2B5EF4-FFF2-40B4-BE49-F238E27FC236}">
-                <a16:creationId xmlns:a16="http://schemas.microsoft.com/office/drawing/2014/main" id="{3FD2823D-DE47-AF9A-1C74-6885C570E356}"/>
+                <a16:creationId xmlns:a16="http://schemas.microsoft.com/office/drawing/2014/main" id="{0D08FBB4-31E9-C3AF-638A-AF717E292011}"/>
               </a:ext>
             </a:extLst>
           </p:cNvPr>
@@ -581,7 +582,7 @@
           <p:cNvPr id="3" name="竖排文字占位符 2">
             <a:extLst>
               <a:ext uri="{FF2B5EF4-FFF2-40B4-BE49-F238E27FC236}">
-                <a16:creationId xmlns:a16="http://schemas.microsoft.com/office/drawing/2014/main" id="{F2C025D3-87F9-0B48-25C6-72BD990DC385}"/>
+                <a16:creationId xmlns:a16="http://schemas.microsoft.com/office/drawing/2014/main" id="{573C354E-189A-222C-4CD6-D8DE4B1D4E46}"/>
               </a:ext>
             </a:extLst>
           </p:cNvPr>
@@ -643,7 +644,7 @@
           <p:cNvPr id="4" name="日期占位符 3">
             <a:extLst>
               <a:ext uri="{FF2B5EF4-FFF2-40B4-BE49-F238E27FC236}">
-                <a16:creationId xmlns:a16="http://schemas.microsoft.com/office/drawing/2014/main" id="{CF3E397D-D335-2C3E-02EC-58421D736FFA}"/>
+                <a16:creationId xmlns:a16="http://schemas.microsoft.com/office/drawing/2014/main" id="{B385DCB3-EC4F-44D6-4AFD-7704BE675163}"/>
               </a:ext>
             </a:extLst>
           </p:cNvPr>
@@ -659,9 +660,9 @@
           <a:bodyPr/>
           <a:lstStyle/>
           <a:p>
-            <a:fld id="{7487D30D-F19A-4894-AB07-6FF315866570}" type="datetimeFigureOut">
+            <a:fld id="{89472238-C0D0-468E-B311-CAE8001729F9}" type="datetimeFigureOut">
               <a:rPr lang="zh-CN" altLang="en-US" smtClean="0"/>
-              <a:t>2026/10/23</a:t>
+              <a:t>2026/10/26</a:t>
             </a:fld>
             <a:endParaRPr lang="zh-CN" altLang="en-US"/>
           </a:p>
@@ -672,7 +673,7 @@
           <p:cNvPr id="5" name="页脚占位符 4">
             <a:extLst>
               <a:ext uri="{FF2B5EF4-FFF2-40B4-BE49-F238E27FC236}">
-                <a16:creationId xmlns:a16="http://schemas.microsoft.com/office/drawing/2014/main" id="{93C8E202-5773-4D38-3100-5C1DA2889ACB}"/>
+                <a16:creationId xmlns:a16="http://schemas.microsoft.com/office/drawing/2014/main" id="{D9CF91F8-86BD-7303-F6EE-FF3E8A2BCE7B}"/>
               </a:ext>
             </a:extLst>
           </p:cNvPr>
@@ -697,7 +698,7 @@
           <p:cNvPr id="6" name="灯片编号占位符 5">
             <a:extLst>
               <a:ext uri="{FF2B5EF4-FFF2-40B4-BE49-F238E27FC236}">
-                <a16:creationId xmlns:a16="http://schemas.microsoft.com/office/drawing/2014/main" id="{7117277A-8665-8329-1D37-357936EF46B3}"/>
+                <a16:creationId xmlns:a16="http://schemas.microsoft.com/office/drawing/2014/main" id="{714DAB6A-AF30-5148-517A-780142E729C1}"/>
               </a:ext>
             </a:extLst>
           </p:cNvPr>
@@ -713,7 +714,7 @@
           <a:bodyPr/>
           <a:lstStyle/>
           <a:p>
-            <a:fld id="{A6AED4CA-9A86-4B7F-8E0E-2971A6EFE002}" type="slidenum">
+            <a:fld id="{22879A0B-3D3A-4059-8B1F-A9091D248FD3}" type="slidenum">
               <a:rPr lang="zh-CN" altLang="en-US" smtClean="0"/>
               <a:t>‹#›</a:t>
             </a:fld>
@@ -724,7 +725,7 @@
     </p:spTree>
     <p:extLst>
       <p:ext uri="{BB962C8B-B14F-4D97-AF65-F5344CB8AC3E}">
-        <p14:creationId xmlns:p14="http://schemas.microsoft.com/office/powerpoint/2010/main" val="3309685185"/>
+        <p14:creationId xmlns:p14="http://schemas.microsoft.com/office/powerpoint/2010/main" val="3217081720"/>
       </p:ext>
     </p:extLst>
   </p:cSld>
@@ -756,7 +757,7 @@
           <p:cNvPr id="2" name="标题 1">
             <a:extLst>
               <a:ext uri="{FF2B5EF4-FFF2-40B4-BE49-F238E27FC236}">
-                <a16:creationId xmlns:a16="http://schemas.microsoft.com/office/drawing/2014/main" id="{60811A78-13A0-FC4A-B982-4D7515423451}"/>
+                <a16:creationId xmlns:a16="http://schemas.microsoft.com/office/drawing/2014/main" id="{9B80CFAC-E6D6-210D-8804-67758720FCCC}"/>
               </a:ext>
             </a:extLst>
           </p:cNvPr>
@@ -784,7 +785,7 @@
           <p:cNvPr id="3" name="内容占位符 2">
             <a:extLst>
               <a:ext uri="{FF2B5EF4-FFF2-40B4-BE49-F238E27FC236}">
-                <a16:creationId xmlns:a16="http://schemas.microsoft.com/office/drawing/2014/main" id="{99F929FF-A77D-BC65-BA74-88F63839DAF0}"/>
+                <a16:creationId xmlns:a16="http://schemas.microsoft.com/office/drawing/2014/main" id="{669DBDDF-98E8-8E2E-A9B6-9BCA8992F4A1}"/>
               </a:ext>
             </a:extLst>
           </p:cNvPr>
@@ -841,7 +842,7 @@
           <p:cNvPr id="4" name="日期占位符 3">
             <a:extLst>
               <a:ext uri="{FF2B5EF4-FFF2-40B4-BE49-F238E27FC236}">
-                <a16:creationId xmlns:a16="http://schemas.microsoft.com/office/drawing/2014/main" id="{0F598C11-C3BA-50AE-60C4-B7D797A1C1B9}"/>
+                <a16:creationId xmlns:a16="http://schemas.microsoft.com/office/drawing/2014/main" id="{FFC91E1D-2DAA-B116-5688-616B271C617A}"/>
               </a:ext>
             </a:extLst>
           </p:cNvPr>
@@ -857,9 +858,9 @@
           <a:bodyPr/>
           <a:lstStyle/>
           <a:p>
-            <a:fld id="{7487D30D-F19A-4894-AB07-6FF315866570}" type="datetimeFigureOut">
+            <a:fld id="{89472238-C0D0-468E-B311-CAE8001729F9}" type="datetimeFigureOut">
               <a:rPr lang="zh-CN" altLang="en-US" smtClean="0"/>
-              <a:t>2026/10/23</a:t>
+              <a:t>2026/10/26</a:t>
             </a:fld>
             <a:endParaRPr lang="zh-CN" altLang="en-US"/>
           </a:p>
@@ -870,7 +871,7 @@
           <p:cNvPr id="5" name="页脚占位符 4">
             <a:extLst>
               <a:ext uri="{FF2B5EF4-FFF2-40B4-BE49-F238E27FC236}">
-                <a16:creationId xmlns:a16="http://schemas.microsoft.com/office/drawing/2014/main" id="{89721E08-96DC-C77E-636F-01C1DD162FBE}"/>
+                <a16:creationId xmlns:a16="http://schemas.microsoft.com/office/drawing/2014/main" id="{26E712C4-86F1-A041-748D-04236674C1BC}"/>
               </a:ext>
             </a:extLst>
           </p:cNvPr>
@@ -895,7 +896,7 @@
           <p:cNvPr id="6" name="灯片编号占位符 5">
             <a:extLst>
               <a:ext uri="{FF2B5EF4-FFF2-40B4-BE49-F238E27FC236}">
-                <a16:creationId xmlns:a16="http://schemas.microsoft.com/office/drawing/2014/main" id="{C521BF16-3990-6F31-6871-6466689683C1}"/>
+                <a16:creationId xmlns:a16="http://schemas.microsoft.com/office/drawing/2014/main" id="{3F7C8407-A548-BE25-AA82-A75785D8368D}"/>
               </a:ext>
             </a:extLst>
           </p:cNvPr>
@@ -911,7 +912,7 @@
           <a:bodyPr/>
           <a:lstStyle/>
           <a:p>
-            <a:fld id="{A6AED4CA-9A86-4B7F-8E0E-2971A6EFE002}" type="slidenum">
+            <a:fld id="{22879A0B-3D3A-4059-8B1F-A9091D248FD3}" type="slidenum">
               <a:rPr lang="zh-CN" altLang="en-US" smtClean="0"/>
               <a:t>‹#›</a:t>
             </a:fld>
@@ -922,7 +923,7 @@
     </p:spTree>
     <p:extLst>
       <p:ext uri="{BB962C8B-B14F-4D97-AF65-F5344CB8AC3E}">
-        <p14:creationId xmlns:p14="http://schemas.microsoft.com/office/powerpoint/2010/main" val="2657591642"/>
+        <p14:creationId xmlns:p14="http://schemas.microsoft.com/office/powerpoint/2010/main" val="100942415"/>
       </p:ext>
     </p:extLst>
   </p:cSld>
@@ -954,7 +955,7 @@
           <p:cNvPr id="2" name="标题 1">
             <a:extLst>
               <a:ext uri="{FF2B5EF4-FFF2-40B4-BE49-F238E27FC236}">
-                <a16:creationId xmlns:a16="http://schemas.microsoft.com/office/drawing/2014/main" id="{84A37FE8-F4FE-36EC-E8CD-68915FE5A05D}"/>
+                <a16:creationId xmlns:a16="http://schemas.microsoft.com/office/drawing/2014/main" id="{C81E1EEF-5707-CA34-2D3C-22AC7C75BE5B}"/>
               </a:ext>
             </a:extLst>
           </p:cNvPr>
@@ -991,7 +992,7 @@
           <p:cNvPr id="3" name="文本占位符 2">
             <a:extLst>
               <a:ext uri="{FF2B5EF4-FFF2-40B4-BE49-F238E27FC236}">
-                <a16:creationId xmlns:a16="http://schemas.microsoft.com/office/drawing/2014/main" id="{AE37CD89-358A-4694-9B7B-7218050E1913}"/>
+                <a16:creationId xmlns:a16="http://schemas.microsoft.com/office/drawing/2014/main" id="{D5C79CDB-38A5-AD8A-68ED-1ED4E45CB42A}"/>
               </a:ext>
             </a:extLst>
           </p:cNvPr>
@@ -1116,7 +1117,7 @@
           <p:cNvPr id="4" name="日期占位符 3">
             <a:extLst>
               <a:ext uri="{FF2B5EF4-FFF2-40B4-BE49-F238E27FC236}">
-                <a16:creationId xmlns:a16="http://schemas.microsoft.com/office/drawing/2014/main" id="{DE1BC231-C289-25A4-3EA7-F6D2B9E413F7}"/>
+                <a16:creationId xmlns:a16="http://schemas.microsoft.com/office/drawing/2014/main" id="{3169DDED-D2C4-474F-9988-4FDB1F8EEF16}"/>
               </a:ext>
             </a:extLst>
           </p:cNvPr>
@@ -1132,9 +1133,9 @@
           <a:bodyPr/>
           <a:lstStyle/>
           <a:p>
-            <a:fld id="{7487D30D-F19A-4894-AB07-6FF315866570}" type="datetimeFigureOut">
+            <a:fld id="{89472238-C0D0-468E-B311-CAE8001729F9}" type="datetimeFigureOut">
               <a:rPr lang="zh-CN" altLang="en-US" smtClean="0"/>
-              <a:t>2026/10/23</a:t>
+              <a:t>2026/10/26</a:t>
             </a:fld>
             <a:endParaRPr lang="zh-CN" altLang="en-US"/>
           </a:p>
@@ -1145,7 +1146,7 @@
           <p:cNvPr id="5" name="页脚占位符 4">
             <a:extLst>
               <a:ext uri="{FF2B5EF4-FFF2-40B4-BE49-F238E27FC236}">
-                <a16:creationId xmlns:a16="http://schemas.microsoft.com/office/drawing/2014/main" id="{D2CC260B-6468-026C-0B5C-2D813A17F110}"/>
+                <a16:creationId xmlns:a16="http://schemas.microsoft.com/office/drawing/2014/main" id="{2245963F-95A7-7076-088D-92BF5814FF2E}"/>
               </a:ext>
             </a:extLst>
           </p:cNvPr>
@@ -1170,7 +1171,7 @@
           <p:cNvPr id="6" name="灯片编号占位符 5">
             <a:extLst>
               <a:ext uri="{FF2B5EF4-FFF2-40B4-BE49-F238E27FC236}">
-                <a16:creationId xmlns:a16="http://schemas.microsoft.com/office/drawing/2014/main" id="{78CD89E9-4BE9-790C-2829-5EDC8D71111D}"/>
+                <a16:creationId xmlns:a16="http://schemas.microsoft.com/office/drawing/2014/main" id="{68373CEA-051D-5206-CD88-CD3289F9F76F}"/>
               </a:ext>
             </a:extLst>
           </p:cNvPr>
@@ -1186,7 +1187,7 @@
           <a:bodyPr/>
           <a:lstStyle/>
           <a:p>
-            <a:fld id="{A6AED4CA-9A86-4B7F-8E0E-2971A6EFE002}" type="slidenum">
+            <a:fld id="{22879A0B-3D3A-4059-8B1F-A9091D248FD3}" type="slidenum">
               <a:rPr lang="zh-CN" altLang="en-US" smtClean="0"/>
               <a:t>‹#›</a:t>
             </a:fld>
@@ -1197,7 +1198,7 @@
     </p:spTree>
     <p:extLst>
       <p:ext uri="{BB962C8B-B14F-4D97-AF65-F5344CB8AC3E}">
-        <p14:creationId xmlns:p14="http://schemas.microsoft.com/office/powerpoint/2010/main" val="1388230900"/>
+        <p14:creationId xmlns:p14="http://schemas.microsoft.com/office/powerpoint/2010/main" val="451328711"/>
       </p:ext>
     </p:extLst>
   </p:cSld>
@@ -1229,7 +1230,7 @@
           <p:cNvPr id="2" name="标题 1">
             <a:extLst>
               <a:ext uri="{FF2B5EF4-FFF2-40B4-BE49-F238E27FC236}">
-                <a16:creationId xmlns:a16="http://schemas.microsoft.com/office/drawing/2014/main" id="{43BD7568-3792-32EC-FF54-B1E5E601FF68}"/>
+                <a16:creationId xmlns:a16="http://schemas.microsoft.com/office/drawing/2014/main" id="{6E1FEE65-80BB-6F29-CDF4-4FC8086D5238}"/>
               </a:ext>
             </a:extLst>
           </p:cNvPr>
@@ -1257,7 +1258,7 @@
           <p:cNvPr id="3" name="内容占位符 2">
             <a:extLst>
               <a:ext uri="{FF2B5EF4-FFF2-40B4-BE49-F238E27FC236}">
-                <a16:creationId xmlns:a16="http://schemas.microsoft.com/office/drawing/2014/main" id="{CB73EB5D-0C49-0FDF-44A1-F6E20765B37B}"/>
+                <a16:creationId xmlns:a16="http://schemas.microsoft.com/office/drawing/2014/main" id="{26624276-A383-7416-BF53-2419BD80621B}"/>
               </a:ext>
             </a:extLst>
           </p:cNvPr>
@@ -1319,7 +1320,7 @@
           <p:cNvPr id="4" name="内容占位符 3">
             <a:extLst>
               <a:ext uri="{FF2B5EF4-FFF2-40B4-BE49-F238E27FC236}">
-                <a16:creationId xmlns:a16="http://schemas.microsoft.com/office/drawing/2014/main" id="{ACC153B3-043A-857F-9DB8-AD68C9F549B3}"/>
+                <a16:creationId xmlns:a16="http://schemas.microsoft.com/office/drawing/2014/main" id="{DBA44830-12E2-6852-5CD7-DD9DE467BD9F}"/>
               </a:ext>
             </a:extLst>
           </p:cNvPr>
@@ -1381,7 +1382,7 @@
           <p:cNvPr id="5" name="日期占位符 4">
             <a:extLst>
               <a:ext uri="{FF2B5EF4-FFF2-40B4-BE49-F238E27FC236}">
-                <a16:creationId xmlns:a16="http://schemas.microsoft.com/office/drawing/2014/main" id="{0FE4C352-E6D1-7748-E988-A26604CF93D4}"/>
+                <a16:creationId xmlns:a16="http://schemas.microsoft.com/office/drawing/2014/main" id="{18AC83B1-5E1D-9BA3-CAFC-6B50A2DC6FA2}"/>
               </a:ext>
             </a:extLst>
           </p:cNvPr>
@@ -1397,9 +1398,9 @@
           <a:bodyPr/>
           <a:lstStyle/>
           <a:p>
-            <a:fld id="{7487D30D-F19A-4894-AB07-6FF315866570}" type="datetimeFigureOut">
+            <a:fld id="{89472238-C0D0-468E-B311-CAE8001729F9}" type="datetimeFigureOut">
               <a:rPr lang="zh-CN" altLang="en-US" smtClean="0"/>
-              <a:t>2026/10/23</a:t>
+              <a:t>2026/10/26</a:t>
             </a:fld>
             <a:endParaRPr lang="zh-CN" altLang="en-US"/>
           </a:p>
@@ -1410,7 +1411,7 @@
           <p:cNvPr id="6" name="页脚占位符 5">
             <a:extLst>
               <a:ext uri="{FF2B5EF4-FFF2-40B4-BE49-F238E27FC236}">
-                <a16:creationId xmlns:a16="http://schemas.microsoft.com/office/drawing/2014/main" id="{8206D6C7-B010-C809-661C-08CD19322E3A}"/>
+                <a16:creationId xmlns:a16="http://schemas.microsoft.com/office/drawing/2014/main" id="{A03918A5-73EC-AE65-C730-9D862ABA0109}"/>
               </a:ext>
             </a:extLst>
           </p:cNvPr>
@@ -1435,7 +1436,7 @@
           <p:cNvPr id="7" name="灯片编号占位符 6">
             <a:extLst>
               <a:ext uri="{FF2B5EF4-FFF2-40B4-BE49-F238E27FC236}">
-                <a16:creationId xmlns:a16="http://schemas.microsoft.com/office/drawing/2014/main" id="{25264E39-8561-98B1-DD00-F5F3223C9D25}"/>
+                <a16:creationId xmlns:a16="http://schemas.microsoft.com/office/drawing/2014/main" id="{933A12EA-F59E-0D55-2047-1F13985E4A12}"/>
               </a:ext>
             </a:extLst>
           </p:cNvPr>
@@ -1451,7 +1452,7 @@
           <a:bodyPr/>
           <a:lstStyle/>
           <a:p>
-            <a:fld id="{A6AED4CA-9A86-4B7F-8E0E-2971A6EFE002}" type="slidenum">
+            <a:fld id="{22879A0B-3D3A-4059-8B1F-A9091D248FD3}" type="slidenum">
               <a:rPr lang="zh-CN" altLang="en-US" smtClean="0"/>
               <a:t>‹#›</a:t>
             </a:fld>
@@ -1462,7 +1463,7 @@
     </p:spTree>
     <p:extLst>
       <p:ext uri="{BB962C8B-B14F-4D97-AF65-F5344CB8AC3E}">
-        <p14:creationId xmlns:p14="http://schemas.microsoft.com/office/powerpoint/2010/main" val="1450056543"/>
+        <p14:creationId xmlns:p14="http://schemas.microsoft.com/office/powerpoint/2010/main" val="2679413244"/>
       </p:ext>
     </p:extLst>
   </p:cSld>
@@ -1494,7 +1495,7 @@
           <p:cNvPr id="2" name="标题 1">
             <a:extLst>
               <a:ext uri="{FF2B5EF4-FFF2-40B4-BE49-F238E27FC236}">
-                <a16:creationId xmlns:a16="http://schemas.microsoft.com/office/drawing/2014/main" id="{B4180020-EA02-E54A-47DA-92D5A52FB8B6}"/>
+                <a16:creationId xmlns:a16="http://schemas.microsoft.com/office/drawing/2014/main" id="{D74A47D2-579C-8AD5-03B7-97EC26EB7E10}"/>
               </a:ext>
             </a:extLst>
           </p:cNvPr>
@@ -1527,7 +1528,7 @@
           <p:cNvPr id="3" name="文本占位符 2">
             <a:extLst>
               <a:ext uri="{FF2B5EF4-FFF2-40B4-BE49-F238E27FC236}">
-                <a16:creationId xmlns:a16="http://schemas.microsoft.com/office/drawing/2014/main" id="{16AF40EB-2E9B-D0E5-3AC0-A64DC1EA7A8D}"/>
+                <a16:creationId xmlns:a16="http://schemas.microsoft.com/office/drawing/2014/main" id="{FE28BF3B-AED1-AE6E-090C-D89FFFF816AA}"/>
               </a:ext>
             </a:extLst>
           </p:cNvPr>
@@ -1598,7 +1599,7 @@
           <p:cNvPr id="4" name="内容占位符 3">
             <a:extLst>
               <a:ext uri="{FF2B5EF4-FFF2-40B4-BE49-F238E27FC236}">
-                <a16:creationId xmlns:a16="http://schemas.microsoft.com/office/drawing/2014/main" id="{BAEF1B7D-14C2-8AB8-19E7-80EC4F4F149C}"/>
+                <a16:creationId xmlns:a16="http://schemas.microsoft.com/office/drawing/2014/main" id="{A69300D7-5CD0-3BF2-8505-901850EBE103}"/>
               </a:ext>
             </a:extLst>
           </p:cNvPr>
@@ -1660,7 +1661,7 @@
           <p:cNvPr id="5" name="文本占位符 4">
             <a:extLst>
               <a:ext uri="{FF2B5EF4-FFF2-40B4-BE49-F238E27FC236}">
-                <a16:creationId xmlns:a16="http://schemas.microsoft.com/office/drawing/2014/main" id="{230D3809-B627-FA07-344A-36D9BB0CDF8E}"/>
+                <a16:creationId xmlns:a16="http://schemas.microsoft.com/office/drawing/2014/main" id="{18310F0C-AC30-8B3B-EB44-8F0AC7A7FFF3}"/>
               </a:ext>
             </a:extLst>
           </p:cNvPr>
@@ -1731,7 +1732,7 @@
           <p:cNvPr id="6" name="内容占位符 5">
             <a:extLst>
               <a:ext uri="{FF2B5EF4-FFF2-40B4-BE49-F238E27FC236}">
-                <a16:creationId xmlns:a16="http://schemas.microsoft.com/office/drawing/2014/main" id="{13549FE2-8DE4-202C-1703-AB69CA8C8D31}"/>
+                <a16:creationId xmlns:a16="http://schemas.microsoft.com/office/drawing/2014/main" id="{18D91816-9370-4919-FB11-9BFDA09D11F9}"/>
               </a:ext>
             </a:extLst>
           </p:cNvPr>
@@ -1793,7 +1794,7 @@
           <p:cNvPr id="7" name="日期占位符 6">
             <a:extLst>
               <a:ext uri="{FF2B5EF4-FFF2-40B4-BE49-F238E27FC236}">
-                <a16:creationId xmlns:a16="http://schemas.microsoft.com/office/drawing/2014/main" id="{FEE9956E-59F7-E080-3425-3613D48ABDAE}"/>
+                <a16:creationId xmlns:a16="http://schemas.microsoft.com/office/drawing/2014/main" id="{9CD65221-398A-628B-BFF4-76EF40AF7F84}"/>
               </a:ext>
             </a:extLst>
           </p:cNvPr>
@@ -1809,9 +1810,9 @@
           <a:bodyPr/>
           <a:lstStyle/>
           <a:p>
-            <a:fld id="{7487D30D-F19A-4894-AB07-6FF315866570}" type="datetimeFigureOut">
+            <a:fld id="{89472238-C0D0-468E-B311-CAE8001729F9}" type="datetimeFigureOut">
               <a:rPr lang="zh-CN" altLang="en-US" smtClean="0"/>
-              <a:t>2026/10/23</a:t>
+              <a:t>2026/10/26</a:t>
             </a:fld>
             <a:endParaRPr lang="zh-CN" altLang="en-US"/>
           </a:p>
@@ -1822,7 +1823,7 @@
           <p:cNvPr id="8" name="页脚占位符 7">
             <a:extLst>
               <a:ext uri="{FF2B5EF4-FFF2-40B4-BE49-F238E27FC236}">
-                <a16:creationId xmlns:a16="http://schemas.microsoft.com/office/drawing/2014/main" id="{059E487B-32F5-2235-3B91-06B0E6BFF836}"/>
+                <a16:creationId xmlns:a16="http://schemas.microsoft.com/office/drawing/2014/main" id="{2D674CDE-C86F-C23A-4F2E-815F2D5F601B}"/>
               </a:ext>
             </a:extLst>
           </p:cNvPr>
@@ -1847,7 +1848,7 @@
           <p:cNvPr id="9" name="灯片编号占位符 8">
             <a:extLst>
               <a:ext uri="{FF2B5EF4-FFF2-40B4-BE49-F238E27FC236}">
-                <a16:creationId xmlns:a16="http://schemas.microsoft.com/office/drawing/2014/main" id="{95DE765A-11E7-95A8-52C6-D2F6081FF383}"/>
+                <a16:creationId xmlns:a16="http://schemas.microsoft.com/office/drawing/2014/main" id="{D7CAE3AC-F4EB-693E-ED4C-078B26A77812}"/>
               </a:ext>
             </a:extLst>
           </p:cNvPr>
@@ -1863,7 +1864,7 @@
           <a:bodyPr/>
           <a:lstStyle/>
           <a:p>
-            <a:fld id="{A6AED4CA-9A86-4B7F-8E0E-2971A6EFE002}" type="slidenum">
+            <a:fld id="{22879A0B-3D3A-4059-8B1F-A9091D248FD3}" type="slidenum">
               <a:rPr lang="zh-CN" altLang="en-US" smtClean="0"/>
               <a:t>‹#›</a:t>
             </a:fld>
@@ -1874,7 +1875,7 @@
     </p:spTree>
     <p:extLst>
       <p:ext uri="{BB962C8B-B14F-4D97-AF65-F5344CB8AC3E}">
-        <p14:creationId xmlns:p14="http://schemas.microsoft.com/office/powerpoint/2010/main" val="1181897402"/>
+        <p14:creationId xmlns:p14="http://schemas.microsoft.com/office/powerpoint/2010/main" val="2254565476"/>
       </p:ext>
     </p:extLst>
   </p:cSld>
@@ -1906,7 +1907,7 @@
           <p:cNvPr id="2" name="标题 1">
             <a:extLst>
               <a:ext uri="{FF2B5EF4-FFF2-40B4-BE49-F238E27FC236}">
-                <a16:creationId xmlns:a16="http://schemas.microsoft.com/office/drawing/2014/main" id="{C83CB0BC-9D7E-BA84-D6FE-E4C97BB7801E}"/>
+                <a16:creationId xmlns:a16="http://schemas.microsoft.com/office/drawing/2014/main" id="{940054E4-10F3-220D-6644-984726354EC5}"/>
               </a:ext>
             </a:extLst>
           </p:cNvPr>
@@ -1934,7 +1935,7 @@
           <p:cNvPr id="3" name="日期占位符 2">
             <a:extLst>
               <a:ext uri="{FF2B5EF4-FFF2-40B4-BE49-F238E27FC236}">
-                <a16:creationId xmlns:a16="http://schemas.microsoft.com/office/drawing/2014/main" id="{55549EA1-97F6-7197-3F10-76B35ADF3F84}"/>
+                <a16:creationId xmlns:a16="http://schemas.microsoft.com/office/drawing/2014/main" id="{A993082D-5D64-D0F7-6367-09DBA14AA5FB}"/>
               </a:ext>
             </a:extLst>
           </p:cNvPr>
@@ -1950,9 +1951,9 @@
           <a:bodyPr/>
           <a:lstStyle/>
           <a:p>
-            <a:fld id="{7487D30D-F19A-4894-AB07-6FF315866570}" type="datetimeFigureOut">
+            <a:fld id="{89472238-C0D0-468E-B311-CAE8001729F9}" type="datetimeFigureOut">
               <a:rPr lang="zh-CN" altLang="en-US" smtClean="0"/>
-              <a:t>2026/10/23</a:t>
+              <a:t>2026/10/26</a:t>
             </a:fld>
             <a:endParaRPr lang="zh-CN" altLang="en-US"/>
           </a:p>
@@ -1963,7 +1964,7 @@
           <p:cNvPr id="4" name="页脚占位符 3">
             <a:extLst>
               <a:ext uri="{FF2B5EF4-FFF2-40B4-BE49-F238E27FC236}">
-                <a16:creationId xmlns:a16="http://schemas.microsoft.com/office/drawing/2014/main" id="{EFDE936F-8878-7C24-775C-E73AFDEDC7BA}"/>
+                <a16:creationId xmlns:a16="http://schemas.microsoft.com/office/drawing/2014/main" id="{839776DE-599D-97E3-439A-F98580E1CD4D}"/>
               </a:ext>
             </a:extLst>
           </p:cNvPr>
@@ -1988,7 +1989,7 @@
           <p:cNvPr id="5" name="灯片编号占位符 4">
             <a:extLst>
               <a:ext uri="{FF2B5EF4-FFF2-40B4-BE49-F238E27FC236}">
-                <a16:creationId xmlns:a16="http://schemas.microsoft.com/office/drawing/2014/main" id="{647F2FD1-BD26-53F3-D0FA-C6A3BB8ADB0E}"/>
+                <a16:creationId xmlns:a16="http://schemas.microsoft.com/office/drawing/2014/main" id="{B2362F9D-3672-A843-E133-19FBB9F98221}"/>
               </a:ext>
             </a:extLst>
           </p:cNvPr>
@@ -2004,7 +2005,7 @@
           <a:bodyPr/>
           <a:lstStyle/>
           <a:p>
-            <a:fld id="{A6AED4CA-9A86-4B7F-8E0E-2971A6EFE002}" type="slidenum">
+            <a:fld id="{22879A0B-3D3A-4059-8B1F-A9091D248FD3}" type="slidenum">
               <a:rPr lang="zh-CN" altLang="en-US" smtClean="0"/>
               <a:t>‹#›</a:t>
             </a:fld>
@@ -2015,7 +2016,7 @@
     </p:spTree>
     <p:extLst>
       <p:ext uri="{BB962C8B-B14F-4D97-AF65-F5344CB8AC3E}">
-        <p14:creationId xmlns:p14="http://schemas.microsoft.com/office/powerpoint/2010/main" val="1133642702"/>
+        <p14:creationId xmlns:p14="http://schemas.microsoft.com/office/powerpoint/2010/main" val="4117772824"/>
       </p:ext>
     </p:extLst>
   </p:cSld>
@@ -2047,7 +2048,7 @@
           <p:cNvPr id="2" name="日期占位符 1">
             <a:extLst>
               <a:ext uri="{FF2B5EF4-FFF2-40B4-BE49-F238E27FC236}">
-                <a16:creationId xmlns:a16="http://schemas.microsoft.com/office/drawing/2014/main" id="{D7DDC64A-EAA3-DC9C-2D26-9D7BD722686D}"/>
+                <a16:creationId xmlns:a16="http://schemas.microsoft.com/office/drawing/2014/main" id="{213B5A86-57C6-DD41-F49C-84731BB0DF4C}"/>
               </a:ext>
             </a:extLst>
           </p:cNvPr>
@@ -2063,9 +2064,9 @@
           <a:bodyPr/>
           <a:lstStyle/>
           <a:p>
-            <a:fld id="{7487D30D-F19A-4894-AB07-6FF315866570}" type="datetimeFigureOut">
+            <a:fld id="{89472238-C0D0-468E-B311-CAE8001729F9}" type="datetimeFigureOut">
               <a:rPr lang="zh-CN" altLang="en-US" smtClean="0"/>
-              <a:t>2026/10/23</a:t>
+              <a:t>2026/10/26</a:t>
             </a:fld>
             <a:endParaRPr lang="zh-CN" altLang="en-US"/>
           </a:p>
@@ -2076,7 +2077,7 @@
           <p:cNvPr id="3" name="页脚占位符 2">
             <a:extLst>
               <a:ext uri="{FF2B5EF4-FFF2-40B4-BE49-F238E27FC236}">
-                <a16:creationId xmlns:a16="http://schemas.microsoft.com/office/drawing/2014/main" id="{F9994DE8-5BFB-93B1-EB4F-6C4E0BD2409D}"/>
+                <a16:creationId xmlns:a16="http://schemas.microsoft.com/office/drawing/2014/main" id="{F505824D-5838-C792-70D6-898BD1511E29}"/>
               </a:ext>
             </a:extLst>
           </p:cNvPr>
@@ -2101,7 +2102,7 @@
           <p:cNvPr id="4" name="灯片编号占位符 3">
             <a:extLst>
               <a:ext uri="{FF2B5EF4-FFF2-40B4-BE49-F238E27FC236}">
-                <a16:creationId xmlns:a16="http://schemas.microsoft.com/office/drawing/2014/main" id="{7645F6E3-077D-E9C4-1A4E-83E3E42FB3CA}"/>
+                <a16:creationId xmlns:a16="http://schemas.microsoft.com/office/drawing/2014/main" id="{FA30E2F7-A960-1F53-8BB0-A149C98FA6A1}"/>
               </a:ext>
             </a:extLst>
           </p:cNvPr>
@@ -2117,7 +2118,7 @@
           <a:bodyPr/>
           <a:lstStyle/>
           <a:p>
-            <a:fld id="{A6AED4CA-9A86-4B7F-8E0E-2971A6EFE002}" type="slidenum">
+            <a:fld id="{22879A0B-3D3A-4059-8B1F-A9091D248FD3}" type="slidenum">
               <a:rPr lang="zh-CN" altLang="en-US" smtClean="0"/>
               <a:t>‹#›</a:t>
             </a:fld>
@@ -2128,7 +2129,7 @@
     </p:spTree>
     <p:extLst>
       <p:ext uri="{BB962C8B-B14F-4D97-AF65-F5344CB8AC3E}">
-        <p14:creationId xmlns:p14="http://schemas.microsoft.com/office/powerpoint/2010/main" val="2833523708"/>
+        <p14:creationId xmlns:p14="http://schemas.microsoft.com/office/powerpoint/2010/main" val="702676319"/>
       </p:ext>
     </p:extLst>
   </p:cSld>
@@ -2160,7 +2161,7 @@
           <p:cNvPr id="2" name="标题 1">
             <a:extLst>
               <a:ext uri="{FF2B5EF4-FFF2-40B4-BE49-F238E27FC236}">
-                <a16:creationId xmlns:a16="http://schemas.microsoft.com/office/drawing/2014/main" id="{4F8C482C-BF44-D531-BBDC-7FC9E13DB622}"/>
+                <a16:creationId xmlns:a16="http://schemas.microsoft.com/office/drawing/2014/main" id="{1A50DC4E-2499-8E79-30CD-3599C0FA87DA}"/>
               </a:ext>
             </a:extLst>
           </p:cNvPr>
@@ -2197,7 +2198,7 @@
           <p:cNvPr id="3" name="内容占位符 2">
             <a:extLst>
               <a:ext uri="{FF2B5EF4-FFF2-40B4-BE49-F238E27FC236}">
-                <a16:creationId xmlns:a16="http://schemas.microsoft.com/office/drawing/2014/main" id="{E381CBAD-73B3-4AA5-6870-36B4BB09DE56}"/>
+                <a16:creationId xmlns:a16="http://schemas.microsoft.com/office/drawing/2014/main" id="{1651B1BF-221D-DADE-B763-6138CC1D4BCB}"/>
               </a:ext>
             </a:extLst>
           </p:cNvPr>
@@ -2287,7 +2288,7 @@
           <p:cNvPr id="4" name="文本占位符 3">
             <a:extLst>
               <a:ext uri="{FF2B5EF4-FFF2-40B4-BE49-F238E27FC236}">
-                <a16:creationId xmlns:a16="http://schemas.microsoft.com/office/drawing/2014/main" id="{707DF69B-78BD-78E5-AC65-400FD837040F}"/>
+                <a16:creationId xmlns:a16="http://schemas.microsoft.com/office/drawing/2014/main" id="{CF8B5D2D-247D-1DC8-49C6-238547FDC9E5}"/>
               </a:ext>
             </a:extLst>
           </p:cNvPr>
@@ -2358,7 +2359,7 @@
           <p:cNvPr id="5" name="日期占位符 4">
             <a:extLst>
               <a:ext uri="{FF2B5EF4-FFF2-40B4-BE49-F238E27FC236}">
-                <a16:creationId xmlns:a16="http://schemas.microsoft.com/office/drawing/2014/main" id="{3007E7EA-6E88-C4FD-06A7-9203DF2E3AD1}"/>
+                <a16:creationId xmlns:a16="http://schemas.microsoft.com/office/drawing/2014/main" id="{9DF1CDC8-707B-B690-7F15-5F788BEDE50C}"/>
               </a:ext>
             </a:extLst>
           </p:cNvPr>
@@ -2374,9 +2375,9 @@
           <a:bodyPr/>
           <a:lstStyle/>
           <a:p>
-            <a:fld id="{7487D30D-F19A-4894-AB07-6FF315866570}" type="datetimeFigureOut">
+            <a:fld id="{89472238-C0D0-468E-B311-CAE8001729F9}" type="datetimeFigureOut">
               <a:rPr lang="zh-CN" altLang="en-US" smtClean="0"/>
-              <a:t>2026/10/23</a:t>
+              <a:t>2026/10/26</a:t>
             </a:fld>
             <a:endParaRPr lang="zh-CN" altLang="en-US"/>
           </a:p>
@@ -2387,7 +2388,7 @@
           <p:cNvPr id="6" name="页脚占位符 5">
             <a:extLst>
               <a:ext uri="{FF2B5EF4-FFF2-40B4-BE49-F238E27FC236}">
-                <a16:creationId xmlns:a16="http://schemas.microsoft.com/office/drawing/2014/main" id="{61F067C1-FB79-6873-3DC2-3A4075D59882}"/>
+                <a16:creationId xmlns:a16="http://schemas.microsoft.com/office/drawing/2014/main" id="{C6A0B4A5-4696-C37A-2D8A-0290DAF33FBF}"/>
               </a:ext>
             </a:extLst>
           </p:cNvPr>
@@ -2412,7 +2413,7 @@
           <p:cNvPr id="7" name="灯片编号占位符 6">
             <a:extLst>
               <a:ext uri="{FF2B5EF4-FFF2-40B4-BE49-F238E27FC236}">
-                <a16:creationId xmlns:a16="http://schemas.microsoft.com/office/drawing/2014/main" id="{A1041B21-AA99-DC74-2927-D5D624B97BA6}"/>
+                <a16:creationId xmlns:a16="http://schemas.microsoft.com/office/drawing/2014/main" id="{DC2D01C5-157A-FD15-5F08-E9BB3703F140}"/>
               </a:ext>
             </a:extLst>
           </p:cNvPr>
@@ -2428,7 +2429,7 @@
           <a:bodyPr/>
           <a:lstStyle/>
           <a:p>
-            <a:fld id="{A6AED4CA-9A86-4B7F-8E0E-2971A6EFE002}" type="slidenum">
+            <a:fld id="{22879A0B-3D3A-4059-8B1F-A9091D248FD3}" type="slidenum">
               <a:rPr lang="zh-CN" altLang="en-US" smtClean="0"/>
               <a:t>‹#›</a:t>
             </a:fld>
@@ -2439,7 +2440,7 @@
     </p:spTree>
     <p:extLst>
       <p:ext uri="{BB962C8B-B14F-4D97-AF65-F5344CB8AC3E}">
-        <p14:creationId xmlns:p14="http://schemas.microsoft.com/office/powerpoint/2010/main" val="593930192"/>
+        <p14:creationId xmlns:p14="http://schemas.microsoft.com/office/powerpoint/2010/main" val="3697755261"/>
       </p:ext>
     </p:extLst>
   </p:cSld>
@@ -2471,7 +2472,7 @@
           <p:cNvPr id="2" name="标题 1">
             <a:extLst>
               <a:ext uri="{FF2B5EF4-FFF2-40B4-BE49-F238E27FC236}">
-                <a16:creationId xmlns:a16="http://schemas.microsoft.com/office/drawing/2014/main" id="{73471BE7-BE0A-2492-CE8E-14A8F28FA2F7}"/>
+                <a16:creationId xmlns:a16="http://schemas.microsoft.com/office/drawing/2014/main" id="{80372629-2C68-FE8F-30BE-92CC052127F7}"/>
               </a:ext>
             </a:extLst>
           </p:cNvPr>
@@ -2508,7 +2509,7 @@
           <p:cNvPr id="3" name="图片占位符 2">
             <a:extLst>
               <a:ext uri="{FF2B5EF4-FFF2-40B4-BE49-F238E27FC236}">
-                <a16:creationId xmlns:a16="http://schemas.microsoft.com/office/drawing/2014/main" id="{807CE9C4-2B68-DE35-1129-43C477257FA1}"/>
+                <a16:creationId xmlns:a16="http://schemas.microsoft.com/office/drawing/2014/main" id="{1C8E0D52-8EE0-8516-BC17-458E1DCFB233}"/>
               </a:ext>
             </a:extLst>
           </p:cNvPr>
@@ -2575,7 +2576,7 @@
           <p:cNvPr id="4" name="文本占位符 3">
             <a:extLst>
               <a:ext uri="{FF2B5EF4-FFF2-40B4-BE49-F238E27FC236}">
-                <a16:creationId xmlns:a16="http://schemas.microsoft.com/office/drawing/2014/main" id="{716D2395-A98A-A54D-8BDC-CE3FF9604095}"/>
+                <a16:creationId xmlns:a16="http://schemas.microsoft.com/office/drawing/2014/main" id="{1AAE90F9-10BC-BEC1-7C9A-89DE577B0843}"/>
               </a:ext>
             </a:extLst>
           </p:cNvPr>
@@ -2646,7 +2647,7 @@
           <p:cNvPr id="5" name="日期占位符 4">
             <a:extLst>
               <a:ext uri="{FF2B5EF4-FFF2-40B4-BE49-F238E27FC236}">
-                <a16:creationId xmlns:a16="http://schemas.microsoft.com/office/drawing/2014/main" id="{614A006E-A69F-8DCE-9E16-EEB61E731F0A}"/>
+                <a16:creationId xmlns:a16="http://schemas.microsoft.com/office/drawing/2014/main" id="{4B027837-197A-0563-97AA-28D0FA885966}"/>
               </a:ext>
             </a:extLst>
           </p:cNvPr>
@@ -2662,9 +2663,9 @@
           <a:bodyPr/>
           <a:lstStyle/>
           <a:p>
-            <a:fld id="{7487D30D-F19A-4894-AB07-6FF315866570}" type="datetimeFigureOut">
+            <a:fld id="{89472238-C0D0-468E-B311-CAE8001729F9}" type="datetimeFigureOut">
               <a:rPr lang="zh-CN" altLang="en-US" smtClean="0"/>
-              <a:t>2026/10/23</a:t>
+              <a:t>2026/10/26</a:t>
             </a:fld>
             <a:endParaRPr lang="zh-CN" altLang="en-US"/>
           </a:p>
@@ -2675,7 +2676,7 @@
           <p:cNvPr id="6" name="页脚占位符 5">
             <a:extLst>
               <a:ext uri="{FF2B5EF4-FFF2-40B4-BE49-F238E27FC236}">
-                <a16:creationId xmlns:a16="http://schemas.microsoft.com/office/drawing/2014/main" id="{0F73AF00-84B9-F52D-DE4E-9CAA7EF1AFB0}"/>
+                <a16:creationId xmlns:a16="http://schemas.microsoft.com/office/drawing/2014/main" id="{4743AA25-A91F-7D60-0B26-03714B5BF42D}"/>
               </a:ext>
             </a:extLst>
           </p:cNvPr>
@@ -2700,7 +2701,7 @@
           <p:cNvPr id="7" name="灯片编号占位符 6">
             <a:extLst>
               <a:ext uri="{FF2B5EF4-FFF2-40B4-BE49-F238E27FC236}">
-                <a16:creationId xmlns:a16="http://schemas.microsoft.com/office/drawing/2014/main" id="{38891B24-F581-C1D7-7079-8B6F34B89821}"/>
+                <a16:creationId xmlns:a16="http://schemas.microsoft.com/office/drawing/2014/main" id="{7343D6DA-9E76-EFE1-BB9B-7925B76E55AB}"/>
               </a:ext>
             </a:extLst>
           </p:cNvPr>
@@ -2716,7 +2717,7 @@
           <a:bodyPr/>
           <a:lstStyle/>
           <a:p>
-            <a:fld id="{A6AED4CA-9A86-4B7F-8E0E-2971A6EFE002}" type="slidenum">
+            <a:fld id="{22879A0B-3D3A-4059-8B1F-A9091D248FD3}" type="slidenum">
               <a:rPr lang="zh-CN" altLang="en-US" smtClean="0"/>
               <a:t>‹#›</a:t>
             </a:fld>
@@ -2727,7 +2728,7 @@
     </p:spTree>
     <p:extLst>
       <p:ext uri="{BB962C8B-B14F-4D97-AF65-F5344CB8AC3E}">
-        <p14:creationId xmlns:p14="http://schemas.microsoft.com/office/powerpoint/2010/main" val="4217570981"/>
+        <p14:creationId xmlns:p14="http://schemas.microsoft.com/office/powerpoint/2010/main" val="2604412030"/>
       </p:ext>
     </p:extLst>
   </p:cSld>
@@ -2764,7 +2765,7 @@
           <p:cNvPr id="2" name="标题占位符 1">
             <a:extLst>
               <a:ext uri="{FF2B5EF4-FFF2-40B4-BE49-F238E27FC236}">
-                <a16:creationId xmlns:a16="http://schemas.microsoft.com/office/drawing/2014/main" id="{4648528F-E82D-F4DE-92C5-324DE15A4AD0}"/>
+                <a16:creationId xmlns:a16="http://schemas.microsoft.com/office/drawing/2014/main" id="{08535BC4-B67C-FECA-22B6-53C302229B1A}"/>
               </a:ext>
             </a:extLst>
           </p:cNvPr>
@@ -2802,7 +2803,7 @@
           <p:cNvPr id="3" name="文本占位符 2">
             <a:extLst>
               <a:ext uri="{FF2B5EF4-FFF2-40B4-BE49-F238E27FC236}">
-                <a16:creationId xmlns:a16="http://schemas.microsoft.com/office/drawing/2014/main" id="{3B40BB7A-55A3-6C4C-49D4-C0B736C217F8}"/>
+                <a16:creationId xmlns:a16="http://schemas.microsoft.com/office/drawing/2014/main" id="{8BD0D89D-8881-C819-B037-E56D048769FB}"/>
               </a:ext>
             </a:extLst>
           </p:cNvPr>
@@ -2869,7 +2870,7 @@
           <p:cNvPr id="4" name="日期占位符 3">
             <a:extLst>
               <a:ext uri="{FF2B5EF4-FFF2-40B4-BE49-F238E27FC236}">
-                <a16:creationId xmlns:a16="http://schemas.microsoft.com/office/drawing/2014/main" id="{C6F6AB4A-9CB7-2D5F-1C1A-63CF2FC313FA}"/>
+                <a16:creationId xmlns:a16="http://schemas.microsoft.com/office/drawing/2014/main" id="{9CF04C41-616A-7488-20DA-6419E56EE1FF}"/>
               </a:ext>
             </a:extLst>
           </p:cNvPr>
@@ -2903,9 +2904,9 @@
             </a:lvl1pPr>
           </a:lstStyle>
           <a:p>
-            <a:fld id="{7487D30D-F19A-4894-AB07-6FF315866570}" type="datetimeFigureOut">
+            <a:fld id="{89472238-C0D0-468E-B311-CAE8001729F9}" type="datetimeFigureOut">
               <a:rPr lang="zh-CN" altLang="en-US" smtClean="0"/>
-              <a:t>2026/10/23</a:t>
+              <a:t>2026/10/26</a:t>
             </a:fld>
             <a:endParaRPr lang="zh-CN" altLang="en-US"/>
           </a:p>
@@ -2916,7 +2917,7 @@
           <p:cNvPr id="5" name="页脚占位符 4">
             <a:extLst>
               <a:ext uri="{FF2B5EF4-FFF2-40B4-BE49-F238E27FC236}">
-                <a16:creationId xmlns:a16="http://schemas.microsoft.com/office/drawing/2014/main" id="{45CEB2B2-18F2-6507-F72F-3A1D5716B044}"/>
+                <a16:creationId xmlns:a16="http://schemas.microsoft.com/office/drawing/2014/main" id="{296C1A89-7B2C-64E0-57CE-D81F2655F00C}"/>
               </a:ext>
             </a:extLst>
           </p:cNvPr>
@@ -2959,7 +2960,7 @@
           <p:cNvPr id="6" name="灯片编号占位符 5">
             <a:extLst>
               <a:ext uri="{FF2B5EF4-FFF2-40B4-BE49-F238E27FC236}">
-                <a16:creationId xmlns:a16="http://schemas.microsoft.com/office/drawing/2014/main" id="{8E23B516-17E6-0A6A-8F8A-1EB3A8FC30CA}"/>
+                <a16:creationId xmlns:a16="http://schemas.microsoft.com/office/drawing/2014/main" id="{EC3BA40C-7782-4041-4404-7AF7E98C5000}"/>
               </a:ext>
             </a:extLst>
           </p:cNvPr>
@@ -2993,7 +2994,7 @@
             </a:lvl1pPr>
           </a:lstStyle>
           <a:p>
-            <a:fld id="{A6AED4CA-9A86-4B7F-8E0E-2971A6EFE002}" type="slidenum">
+            <a:fld id="{22879A0B-3D3A-4059-8B1F-A9091D248FD3}" type="slidenum">
               <a:rPr lang="zh-CN" altLang="en-US" smtClean="0"/>
               <a:t>‹#›</a:t>
             </a:fld>
@@ -3004,7 +3005,7 @@
     </p:spTree>
     <p:extLst>
       <p:ext uri="{BB962C8B-B14F-4D97-AF65-F5344CB8AC3E}">
-        <p14:creationId xmlns:p14="http://schemas.microsoft.com/office/powerpoint/2010/main" val="2977439786"/>
+        <p14:creationId xmlns:p14="http://schemas.microsoft.com/office/powerpoint/2010/main" val="1268908949"/>
       </p:ext>
     </p:extLst>
   </p:cSld>
@@ -3327,7 +3328,7 @@
           <p:cNvPr id="2" name="文本框 1">
             <a:extLst>
               <a:ext uri="{FF2B5EF4-FFF2-40B4-BE49-F238E27FC236}">
-                <a16:creationId xmlns:a16="http://schemas.microsoft.com/office/drawing/2014/main" id="{537BD870-1D65-1AEF-2686-B63091186127}"/>
+                <a16:creationId xmlns:a16="http://schemas.microsoft.com/office/drawing/2014/main" id="{988EA416-E386-7D61-D9BF-0BFE595BB208}"/>
               </a:ext>
             </a:extLst>
           </p:cNvPr>
@@ -3412,7 +3413,7 @@
           <p:cNvPr id="3" name="文本框 2">
             <a:extLst>
               <a:ext uri="{FF2B5EF4-FFF2-40B4-BE49-F238E27FC236}">
-                <a16:creationId xmlns:a16="http://schemas.microsoft.com/office/drawing/2014/main" id="{DDE6026D-3CAD-DE16-55BC-FAFAED688EAC}"/>
+                <a16:creationId xmlns:a16="http://schemas.microsoft.com/office/drawing/2014/main" id="{EDE82DF9-ACDA-C9F5-AFF8-7892B6C263AE}"/>
               </a:ext>
             </a:extLst>
           </p:cNvPr>
@@ -3497,7 +3498,7 @@
           <p:cNvPr id="4" name="文本框 3">
             <a:extLst>
               <a:ext uri="{FF2B5EF4-FFF2-40B4-BE49-F238E27FC236}">
-                <a16:creationId xmlns:a16="http://schemas.microsoft.com/office/drawing/2014/main" id="{40BF5601-58C7-2E77-691D-F4B1EAA1291F}"/>
+                <a16:creationId xmlns:a16="http://schemas.microsoft.com/office/drawing/2014/main" id="{07F660C0-7D8B-55E1-0C91-91A596D820F7}"/>
               </a:ext>
             </a:extLst>
           </p:cNvPr>
@@ -3564,7 +3565,7 @@
           <p:cNvPr id="5" name="文本框 4">
             <a:extLst>
               <a:ext uri="{FF2B5EF4-FFF2-40B4-BE49-F238E27FC236}">
-                <a16:creationId xmlns:a16="http://schemas.microsoft.com/office/drawing/2014/main" id="{1729FBAA-A456-5F79-E92D-59FA9B9061ED}"/>
+                <a16:creationId xmlns:a16="http://schemas.microsoft.com/office/drawing/2014/main" id="{70C27246-9DC4-4875-790E-9C1A680FF89C}"/>
               </a:ext>
             </a:extLst>
           </p:cNvPr>
@@ -3664,7 +3665,7 @@
           <p:cNvPr id="6" name="文本框 5">
             <a:extLst>
               <a:ext uri="{FF2B5EF4-FFF2-40B4-BE49-F238E27FC236}">
-                <a16:creationId xmlns:a16="http://schemas.microsoft.com/office/drawing/2014/main" id="{1EE1E3B1-A808-C7B6-7C9A-18D4A062CA13}"/>
+                <a16:creationId xmlns:a16="http://schemas.microsoft.com/office/drawing/2014/main" id="{131A833B-368E-E352-B75A-C8567C31C3E2}"/>
               </a:ext>
             </a:extLst>
           </p:cNvPr>
@@ -3747,7 +3748,7 @@
     </p:spTree>
     <p:extLst>
       <p:ext uri="{BB962C8B-B14F-4D97-AF65-F5344CB8AC3E}">
-        <p14:creationId xmlns:p14="http://schemas.microsoft.com/office/powerpoint/2010/main" val="2709305964"/>
+        <p14:creationId xmlns:p14="http://schemas.microsoft.com/office/powerpoint/2010/main" val="2220631271"/>
       </p:ext>
     </p:extLst>
   </p:cSld>
@@ -3779,7 +3780,7 @@
           <p:cNvPr id="2" name="文本框 1">
             <a:extLst>
               <a:ext uri="{FF2B5EF4-FFF2-40B4-BE49-F238E27FC236}">
-                <a16:creationId xmlns:a16="http://schemas.microsoft.com/office/drawing/2014/main" id="{914D3636-227A-9E53-4A27-DBF4401BA128}"/>
+                <a16:creationId xmlns:a16="http://schemas.microsoft.com/office/drawing/2014/main" id="{7AAD7EBD-8040-E008-60E9-851CBC7A553F}"/>
               </a:ext>
             </a:extLst>
           </p:cNvPr>
@@ -3864,7 +3865,7 @@
           <p:cNvPr id="3" name="文本框 2">
             <a:extLst>
               <a:ext uri="{FF2B5EF4-FFF2-40B4-BE49-F238E27FC236}">
-                <a16:creationId xmlns:a16="http://schemas.microsoft.com/office/drawing/2014/main" id="{CC5F6BE3-1660-9FBB-C875-1CCDD2CB5A17}"/>
+                <a16:creationId xmlns:a16="http://schemas.microsoft.com/office/drawing/2014/main" id="{3E7FF8F5-1B11-97BD-6C03-7612AE7E7F05}"/>
               </a:ext>
             </a:extLst>
           </p:cNvPr>
@@ -3961,7 +3962,7 @@
           <p:cNvPr id="4" name="文本框 3">
             <a:extLst>
               <a:ext uri="{FF2B5EF4-FFF2-40B4-BE49-F238E27FC236}">
-                <a16:creationId xmlns:a16="http://schemas.microsoft.com/office/drawing/2014/main" id="{EC66892A-E0C2-896E-F308-4F6E8AAC4541}"/>
+                <a16:creationId xmlns:a16="http://schemas.microsoft.com/office/drawing/2014/main" id="{A4554815-D359-EB87-0A99-C5273A7B7877}"/>
               </a:ext>
             </a:extLst>
           </p:cNvPr>
@@ -4025,7 +4026,7 @@
           <p:cNvPr id="5" name="文本框 4">
             <a:extLst>
               <a:ext uri="{FF2B5EF4-FFF2-40B4-BE49-F238E27FC236}">
-                <a16:creationId xmlns:a16="http://schemas.microsoft.com/office/drawing/2014/main" id="{3D06E2DF-B8FF-82FE-4A8D-74B6B3F1B449}"/>
+                <a16:creationId xmlns:a16="http://schemas.microsoft.com/office/drawing/2014/main" id="{5E55BE32-FB99-835B-5CDB-CC3E03B9BEA7}"/>
               </a:ext>
             </a:extLst>
           </p:cNvPr>
@@ -4118,7 +4119,313 @@
     </p:spTree>
     <p:extLst>
       <p:ext uri="{BB962C8B-B14F-4D97-AF65-F5344CB8AC3E}">
-        <p14:creationId xmlns:p14="http://schemas.microsoft.com/office/powerpoint/2010/main" val="1772390141"/>
+        <p14:creationId xmlns:p14="http://schemas.microsoft.com/office/powerpoint/2010/main" val="3348187784"/>
+      </p:ext>
+    </p:extLst>
+  </p:cSld>
+  <p:clrMapOvr>
+    <a:masterClrMapping/>
+  </p:clrMapOvr>
+</p:sld>
+</file>
+
+<file path=ppt/slides/slide3.xml><?xml version="1.0" encoding="utf-8"?>
+<p:sld xmlns:a="http://schemas.openxmlformats.org/drawingml/2006/main" xmlns:r="http://schemas.openxmlformats.org/officeDocument/2006/relationships" xmlns:p="http://schemas.openxmlformats.org/presentationml/2006/main">
+  <p:cSld>
+    <p:spTree>
+      <p:nvGrpSpPr>
+        <p:cNvPr id="1" name=""/>
+        <p:cNvGrpSpPr/>
+        <p:nvPr/>
+      </p:nvGrpSpPr>
+      <p:grpSpPr>
+        <a:xfrm>
+          <a:off x="0" y="0"/>
+          <a:ext cx="0" cy="0"/>
+          <a:chOff x="0" y="0"/>
+          <a:chExt cx="0" cy="0"/>
+        </a:xfrm>
+      </p:grpSpPr>
+      <p:sp>
+        <p:nvSpPr>
+          <p:cNvPr id="2" name="文本框 1">
+            <a:extLst>
+              <a:ext uri="{FF2B5EF4-FFF2-40B4-BE49-F238E27FC236}">
+                <a16:creationId xmlns:a16="http://schemas.microsoft.com/office/drawing/2014/main" id="{DF910CFF-7E3B-AFB5-1F98-534601BCD01F}"/>
+              </a:ext>
+            </a:extLst>
+          </p:cNvPr>
+          <p:cNvSpPr txBox="1"/>
+          <p:nvPr/>
+        </p:nvSpPr>
+        <p:spPr>
+          <a:xfrm>
+            <a:off x="381000" y="101600"/>
+            <a:ext cx="5969000" cy="1219200"/>
+          </a:xfrm>
+          <a:prstGeom prst="rect">
+            <a:avLst/>
+          </a:prstGeom>
+          <a:noFill/>
+        </p:spPr>
+        <p:txBody>
+          <a:bodyPr vert="horz" wrap="square" rtlCol="0">
+            <a:noAutofit/>
+          </a:bodyPr>
+          <a:lstStyle/>
+          <a:p>
+            <a:pPr algn="dist"/>
+            <a:r>
+              <a:rPr lang="zh-CN" altLang="en-US" sz="5400" b="1">
+                <a:solidFill>
+                  <a:srgbClr val="DC0000">
+                    <a:alpha val="50000"/>
+                  </a:srgbClr>
+                </a:solidFill>
+                <a:effectLst>
+                  <a:outerShdw dist="152400" dir="10800000" rotWithShape="0">
+                    <a:srgbClr val="000000">
+                      <a:alpha val="70000"/>
+                    </a:srgbClr>
+                  </a:outerShdw>
+                </a:effectLst>
+                <a:latin typeface="SimSun" panose="02010600030101010101" pitchFamily="2" charset="-122"/>
+                <a:ea typeface="SimSun" panose="02010600030101010101" pitchFamily="2" charset="-122"/>
+              </a:rPr>
+              <a:t>分散对齐阴影加粗</a:t>
+            </a:r>
+          </a:p>
+        </p:txBody>
+      </p:sp>
+      <p:sp>
+        <p:nvSpPr>
+          <p:cNvPr id="3" name="文本框 2">
+            <a:extLst>
+              <a:ext uri="{FF2B5EF4-FFF2-40B4-BE49-F238E27FC236}">
+                <a16:creationId xmlns:a16="http://schemas.microsoft.com/office/drawing/2014/main" id="{9388A14F-B131-D8F8-B49A-D8FCF03235A2}"/>
+              </a:ext>
+            </a:extLst>
+          </p:cNvPr>
+          <p:cNvSpPr txBox="1"/>
+          <p:nvPr/>
+        </p:nvSpPr>
+        <p:spPr>
+          <a:xfrm>
+            <a:off x="381000" y="1422400"/>
+            <a:ext cx="5969000" cy="1219200"/>
+          </a:xfrm>
+          <a:prstGeom prst="rect">
+            <a:avLst/>
+          </a:prstGeom>
+          <a:noFill/>
+        </p:spPr>
+        <p:txBody>
+          <a:bodyPr vert="horz" wrap="square" rtlCol="0">
+            <a:noAutofit/>
+          </a:bodyPr>
+          <a:lstStyle/>
+          <a:p>
+            <a:pPr algn="dist"/>
+            <a:r>
+              <a:rPr lang="zh-CN" altLang="en-US" sz="5400">
+                <a:solidFill>
+                  <a:srgbClr val="DC0000">
+                    <a:alpha val="50000"/>
+                  </a:srgbClr>
+                </a:solidFill>
+                <a:effectLst>
+                  <a:outerShdw dist="152400" dir="10800000" rotWithShape="0">
+                    <a:srgbClr val="000000">
+                      <a:alpha val="70000"/>
+                    </a:srgbClr>
+                  </a:outerShdw>
+                </a:effectLst>
+                <a:latin typeface="SimSun" panose="02010600030101010101" pitchFamily="2" charset="-122"/>
+                <a:ea typeface="SimSun" panose="02010600030101010101" pitchFamily="2" charset="-122"/>
+              </a:rPr>
+              <a:t>分散对齐阴影加粗</a:t>
+            </a:r>
+          </a:p>
+        </p:txBody>
+      </p:sp>
+      <p:sp>
+        <p:nvSpPr>
+          <p:cNvPr id="4" name="文本框 3">
+            <a:extLst>
+              <a:ext uri="{FF2B5EF4-FFF2-40B4-BE49-F238E27FC236}">
+                <a16:creationId xmlns:a16="http://schemas.microsoft.com/office/drawing/2014/main" id="{D7554FFD-9D3A-FB04-7339-99708FA3D553}"/>
+              </a:ext>
+            </a:extLst>
+          </p:cNvPr>
+          <p:cNvSpPr txBox="1"/>
+          <p:nvPr/>
+        </p:nvSpPr>
+        <p:spPr>
+          <a:xfrm>
+            <a:off x="381000" y="2743200"/>
+            <a:ext cx="5969000" cy="1219200"/>
+          </a:xfrm>
+          <a:prstGeom prst="rect">
+            <a:avLst/>
+          </a:prstGeom>
+          <a:noFill/>
+        </p:spPr>
+        <p:txBody>
+          <a:bodyPr vert="horz" wrap="square" rtlCol="0">
+            <a:noAutofit/>
+          </a:bodyPr>
+          <a:lstStyle/>
+          <a:p>
+            <a:pPr algn="dist"/>
+            <a:r>
+              <a:rPr lang="zh-CN" altLang="en-US" sz="5400" b="1">
+                <a:gradFill flip="none" rotWithShape="1">
+                  <a:gsLst>
+                    <a:gs pos="0">
+                      <a:srgbClr val="DC0000">
+                        <a:alpha val="50000"/>
+                      </a:srgbClr>
+                    </a:gs>
+                    <a:gs pos="100000">
+                      <a:srgbClr val="0028DC">
+                        <a:alpha val="50000"/>
+                      </a:srgbClr>
+                    </a:gs>
+                  </a:gsLst>
+                  <a:lin ang="0" scaled="1"/>
+                  <a:tileRect/>
+                </a:gradFill>
+                <a:effectLst>
+                  <a:outerShdw dist="152400" dir="10800000" rotWithShape="0">
+                    <a:srgbClr val="000000">
+                      <a:alpha val="70000"/>
+                    </a:srgbClr>
+                  </a:outerShdw>
+                </a:effectLst>
+                <a:latin typeface="SimSun" panose="02010600030101010101" pitchFamily="2" charset="-122"/>
+                <a:ea typeface="SimSun" panose="02010600030101010101" pitchFamily="2" charset="-122"/>
+              </a:rPr>
+              <a:t>分散对齐阴影加粗</a:t>
+            </a:r>
+          </a:p>
+        </p:txBody>
+      </p:sp>
+      <p:sp>
+        <p:nvSpPr>
+          <p:cNvPr id="5" name="文本框 4">
+            <a:extLst>
+              <a:ext uri="{FF2B5EF4-FFF2-40B4-BE49-F238E27FC236}">
+                <a16:creationId xmlns:a16="http://schemas.microsoft.com/office/drawing/2014/main" id="{37DD7915-2A1F-C2FD-2FD1-1FD35FDCA498}"/>
+              </a:ext>
+            </a:extLst>
+          </p:cNvPr>
+          <p:cNvSpPr txBox="1"/>
+          <p:nvPr/>
+        </p:nvSpPr>
+        <p:spPr>
+          <a:xfrm>
+            <a:off x="381000" y="4064000"/>
+            <a:ext cx="5969000" cy="1219200"/>
+          </a:xfrm>
+          <a:prstGeom prst="rect">
+            <a:avLst/>
+          </a:prstGeom>
+          <a:noFill/>
+        </p:spPr>
+        <p:txBody>
+          <a:bodyPr vert="horz" wrap="square" rtlCol="0">
+            <a:noAutofit/>
+          </a:bodyPr>
+          <a:lstStyle/>
+          <a:p>
+            <a:pPr algn="dist"/>
+            <a:r>
+              <a:rPr lang="zh-CN" altLang="en-US" sz="5400" b="1">
+                <a:ln w="19050">
+                  <a:solidFill>
+                    <a:srgbClr val="3C3C3C"/>
+                  </a:solidFill>
+                </a:ln>
+                <a:gradFill flip="none" rotWithShape="1">
+                  <a:gsLst>
+                    <a:gs pos="0">
+                      <a:srgbClr val="DC0000"/>
+                    </a:gs>
+                    <a:gs pos="100000">
+                      <a:srgbClr val="0028DC"/>
+                    </a:gs>
+                  </a:gsLst>
+                  <a:lin ang="0" scaled="1"/>
+                  <a:tileRect/>
+                </a:gradFill>
+                <a:effectLst>
+                  <a:outerShdw dist="152400" dir="10800000" rotWithShape="0">
+                    <a:srgbClr val="000000">
+                      <a:alpha val="70000"/>
+                    </a:srgbClr>
+                  </a:outerShdw>
+                </a:effectLst>
+                <a:latin typeface="SimSun" panose="02010600030101010101" pitchFamily="2" charset="-122"/>
+                <a:ea typeface="SimSun" panose="02010600030101010101" pitchFamily="2" charset="-122"/>
+              </a:rPr>
+              <a:t>分散对齐阴影加粗</a:t>
+            </a:r>
+          </a:p>
+        </p:txBody>
+      </p:sp>
+      <p:sp>
+        <p:nvSpPr>
+          <p:cNvPr id="6" name="文本框 5">
+            <a:extLst>
+              <a:ext uri="{FF2B5EF4-FFF2-40B4-BE49-F238E27FC236}">
+                <a16:creationId xmlns:a16="http://schemas.microsoft.com/office/drawing/2014/main" id="{A2E67482-4703-3DC3-3579-EE2A3914E3C6}"/>
+              </a:ext>
+            </a:extLst>
+          </p:cNvPr>
+          <p:cNvSpPr txBox="1"/>
+          <p:nvPr/>
+        </p:nvSpPr>
+        <p:spPr>
+          <a:xfrm>
+            <a:off x="381000" y="5384800"/>
+            <a:ext cx="5969000" cy="1219200"/>
+          </a:xfrm>
+          <a:prstGeom prst="rect">
+            <a:avLst/>
+          </a:prstGeom>
+          <a:noFill/>
+        </p:spPr>
+        <p:txBody>
+          <a:bodyPr vert="horz" wrap="square" rtlCol="0">
+            <a:noAutofit/>
+          </a:bodyPr>
+          <a:lstStyle/>
+          <a:p>
+            <a:pPr algn="dist"/>
+            <a:r>
+              <a:rPr lang="zh-CN" altLang="en-US" sz="5400" b="1">
+                <a:solidFill>
+                  <a:srgbClr val="DC0000"/>
+                </a:solidFill>
+                <a:effectLst>
+                  <a:outerShdw dist="152400" dir="10800000" rotWithShape="0">
+                    <a:srgbClr val="000000">
+                      <a:alpha val="70000"/>
+                    </a:srgbClr>
+                  </a:outerShdw>
+                </a:effectLst>
+                <a:latin typeface="SimSun" panose="02010600030101010101" pitchFamily="2" charset="-122"/>
+                <a:ea typeface="SimSun" panose="02010600030101010101" pitchFamily="2" charset="-122"/>
+              </a:rPr>
+              <a:t>分散对齐阴影加粗</a:t>
+            </a:r>
+          </a:p>
+        </p:txBody>
+      </p:sp>
+    </p:spTree>
+    <p:extLst>
+      <p:ext uri="{BB962C8B-B14F-4D97-AF65-F5344CB8AC3E}">
+        <p14:creationId xmlns:p14="http://schemas.microsoft.com/office/powerpoint/2010/main" val="1362474013"/>
       </p:ext>
     </p:extLst>
   </p:cSld>
